--- a/mustand.pptx
+++ b/mustand.pptx
@@ -4060,7 +4060,7 @@
                   <a:srgbClr val="2F2F2F"/>
                 </a:solidFill>
               </a:rPr>
-              <a:t>• Construct common interface for alternative paths</a:t>
+              <a:t>• Inputs use subtype; outputs use supertype</a:t>
             </a:r>
             <a:endParaRPr lang="en-US" sz="2400" dirty="0"/>
           </a:p>
@@ -4254,7 +4254,7 @@
                   <a:srgbClr val="2F2F2F"/>
                 </a:solidFill>
               </a:rPr>
-              <a:t>• =&gt; (char a-addr -- )</a:t>
+              <a:t>• in ⇒ (char a-addr -- ); out x/char ⇒ x</a:t>
             </a:r>
             <a:endParaRPr lang="en-US" sz="2400" dirty="0"/>
           </a:p>
@@ -4808,7 +4808,7 @@
                   <a:srgbClr val="2F2F2F"/>
                 </a:solidFill>
               </a:rPr>
-              <a:t>• Current summary loses path-specific information</a:t>
+              <a:t>• Current: (X X flag -- X X); path permutation is forgotten</a:t>
             </a:r>
             <a:endParaRPr lang="en-US" sz="2400" dirty="0"/>
           </a:p>
@@ -5542,7 +5542,7 @@
                   <a:srgbClr val="2F2F2F"/>
                 </a:solidFill>
               </a:rPr>
-              <a:t>• BEGIN SWAP OVER WHILE NOT REPEAT</a:t>
+              <a:t>• BEGIN SWAP OVER WHILE INVERT REPEAT</a:t>
             </a:r>
             <a:endParaRPr lang="en-US" sz="2400" dirty="0"/>
           </a:p>
@@ -5556,7 +5556,7 @@
                   <a:srgbClr val="2F2F2F"/>
                 </a:solidFill>
               </a:rPr>
-              <a:t>• Effect: (flag[1] flag[1] -- flag[1] flag[1])</a:t>
+              <a:t>• Effect: (flag flag -- flag flag)</a:t>
             </a:r>
             <a:endParaRPr lang="en-US" sz="2400" dirty="0"/>
           </a:p>
